--- a/presentations and info about project/Second presentation.pptx
+++ b/presentations and info about project/Second presentation.pptx
@@ -25,6 +25,7 @@
     <p:sldId id="273" r:id="rId19"/>
     <p:sldId id="274" r:id="rId20"/>
     <p:sldId id="275" r:id="rId21"/>
+    <p:sldId id="276" r:id="rId22"/>
   </p:sldIdLst>
   <p:sldSz cx="12192000" cy="6858000"/>
   <p:notesSz cx="6858000" cy="9144000"/>
@@ -134,7 +135,7 @@
 <file path=ppt/revisionInfo.xml><?xml version="1.0" encoding="utf-8"?>
 <p1510:revInfo xmlns:a="http://schemas.openxmlformats.org/drawingml/2006/main" xmlns:r="http://schemas.openxmlformats.org/officeDocument/2006/relationships" xmlns:p1510="http://schemas.microsoft.com/office/powerpoint/2015/10/main">
   <p1510:revLst>
-    <p1510:client id="{E0863828-691D-428E-8AB1-5395FD5DA598}" v="28" dt="2026-05-14T20:26:13.228"/>
+    <p1510:client id="{E0863828-691D-428E-8AB1-5395FD5DA598}" v="29" dt="2026-05-14T20:28:00.998"/>
   </p1510:revLst>
 </p1510:revInfo>
 </file>
@@ -144,7 +145,7 @@
   <pc:docChgLst>
     <pc:chgData name="Marcel S" userId="33a534d834bb57d4" providerId="LiveId" clId="{E560C73B-C6F7-4310-8CE0-F686C575AC45}"/>
     <pc:docChg chg="undo custSel addSld modSld">
-      <pc:chgData name="Marcel S" userId="33a534d834bb57d4" providerId="LiveId" clId="{E560C73B-C6F7-4310-8CE0-F686C575AC45}" dt="2026-05-14T20:26:13.228" v="868"/>
+      <pc:chgData name="Marcel S" userId="33a534d834bb57d4" providerId="LiveId" clId="{E560C73B-C6F7-4310-8CE0-F686C575AC45}" dt="2026-05-14T20:28:16.835" v="877" actId="1076"/>
       <pc:docMkLst>
         <pc:docMk/>
       </pc:docMkLst>
@@ -960,6 +961,29 @@
           </ac:inkMkLst>
         </pc:inkChg>
       </pc:sldChg>
+      <pc:sldChg chg="modSp new mod">
+        <pc:chgData name="Marcel S" userId="33a534d834bb57d4" providerId="LiveId" clId="{E560C73B-C6F7-4310-8CE0-F686C575AC45}" dt="2026-05-14T20:28:16.835" v="877" actId="1076"/>
+        <pc:sldMkLst>
+          <pc:docMk/>
+          <pc:sldMk cId="44316669" sldId="276"/>
+        </pc:sldMkLst>
+        <pc:spChg chg="mod">
+          <ac:chgData name="Marcel S" userId="33a534d834bb57d4" providerId="LiveId" clId="{E560C73B-C6F7-4310-8CE0-F686C575AC45}" dt="2026-05-14T20:28:06.610" v="871" actId="1076"/>
+          <ac:spMkLst>
+            <pc:docMk/>
+            <pc:sldMk cId="44316669" sldId="276"/>
+            <ac:spMk id="2" creationId="{A2506B09-6A8A-B1FB-9F61-EC98CFE924C7}"/>
+          </ac:spMkLst>
+        </pc:spChg>
+        <pc:spChg chg="mod">
+          <ac:chgData name="Marcel S" userId="33a534d834bb57d4" providerId="LiveId" clId="{E560C73B-C6F7-4310-8CE0-F686C575AC45}" dt="2026-05-14T20:28:16.835" v="877" actId="1076"/>
+          <ac:spMkLst>
+            <pc:docMk/>
+            <pc:sldMk cId="44316669" sldId="276"/>
+            <ac:spMk id="3" creationId="{7DF0B14F-B0C7-404A-1B0B-D8A4A9086EDA}"/>
+          </ac:spMkLst>
+        </pc:spChg>
+      </pc:sldChg>
     </pc:docChg>
   </pc:docChgLst>
 </pc:chgInfo>
@@ -6553,8 +6577,8 @@
           </a:prstGeom>
         </p:spPr>
       </p:pic>
-      <mc:AlternateContent xmlns:mc="http://schemas.openxmlformats.org/markup-compatibility/2006">
-        <mc:Choice xmlns:p14="http://schemas.microsoft.com/office/powerpoint/2010/main" Requires="p14">
+      <mc:AlternateContent xmlns:mc="http://schemas.openxmlformats.org/markup-compatibility/2006" xmlns:p14="http://schemas.microsoft.com/office/powerpoint/2010/main">
+        <mc:Choice Requires="p14">
           <p:contentPart p14:bwMode="auto" r:id="rId3">
             <p14:nvContentPartPr>
               <p14:cNvPr id="8" name="Pismo odręczne 7">
@@ -6573,7 +6597,7 @@
             </p14:xfrm>
           </p:contentPart>
         </mc:Choice>
-        <mc:Fallback>
+        <mc:Fallback xmlns="">
           <p:pic>
             <p:nvPicPr>
               <p:cNvPr id="8" name="Pismo odręczne 7">
@@ -6604,8 +6628,8 @@
           </p:pic>
         </mc:Fallback>
       </mc:AlternateContent>
-      <mc:AlternateContent xmlns:mc="http://schemas.openxmlformats.org/markup-compatibility/2006">
-        <mc:Choice xmlns:p14="http://schemas.microsoft.com/office/powerpoint/2010/main" Requires="p14">
+      <mc:AlternateContent xmlns:mc="http://schemas.openxmlformats.org/markup-compatibility/2006" xmlns:p14="http://schemas.microsoft.com/office/powerpoint/2010/main">
+        <mc:Choice Requires="p14">
           <p:contentPart p14:bwMode="auto" r:id="rId5">
             <p14:nvContentPartPr>
               <p14:cNvPr id="9" name="Pismo odręczne 8">
@@ -6624,7 +6648,7 @@
             </p14:xfrm>
           </p:contentPart>
         </mc:Choice>
-        <mc:Fallback>
+        <mc:Fallback xmlns="">
           <p:pic>
             <p:nvPicPr>
               <p:cNvPr id="9" name="Pismo odręczne 8">
@@ -6655,8 +6679,8 @@
           </p:pic>
         </mc:Fallback>
       </mc:AlternateContent>
-      <mc:AlternateContent xmlns:mc="http://schemas.openxmlformats.org/markup-compatibility/2006">
-        <mc:Choice xmlns:p14="http://schemas.microsoft.com/office/powerpoint/2010/main" Requires="p14">
+      <mc:AlternateContent xmlns:mc="http://schemas.openxmlformats.org/markup-compatibility/2006" xmlns:p14="http://schemas.microsoft.com/office/powerpoint/2010/main">
+        <mc:Choice Requires="p14">
           <p:contentPart p14:bwMode="auto" r:id="rId7">
             <p14:nvContentPartPr>
               <p14:cNvPr id="10" name="Pismo odręczne 9">
@@ -6675,7 +6699,7 @@
             </p14:xfrm>
           </p:contentPart>
         </mc:Choice>
-        <mc:Fallback>
+        <mc:Fallback xmlns="">
           <p:pic>
             <p:nvPicPr>
               <p:cNvPr id="10" name="Pismo odręczne 9">
@@ -6706,8 +6730,8 @@
           </p:pic>
         </mc:Fallback>
       </mc:AlternateContent>
-      <mc:AlternateContent xmlns:mc="http://schemas.openxmlformats.org/markup-compatibility/2006">
-        <mc:Choice xmlns:p14="http://schemas.microsoft.com/office/powerpoint/2010/main" Requires="p14">
+      <mc:AlternateContent xmlns:mc="http://schemas.openxmlformats.org/markup-compatibility/2006" xmlns:p14="http://schemas.microsoft.com/office/powerpoint/2010/main">
+        <mc:Choice Requires="p14">
           <p:contentPart p14:bwMode="auto" r:id="rId9">
             <p14:nvContentPartPr>
               <p14:cNvPr id="11" name="Pismo odręczne 10">
@@ -6726,7 +6750,7 @@
             </p14:xfrm>
           </p:contentPart>
         </mc:Choice>
-        <mc:Fallback>
+        <mc:Fallback xmlns="">
           <p:pic>
             <p:nvPicPr>
               <p:cNvPr id="11" name="Pismo odręczne 10">
@@ -6757,8 +6781,8 @@
           </p:pic>
         </mc:Fallback>
       </mc:AlternateContent>
-      <mc:AlternateContent xmlns:mc="http://schemas.openxmlformats.org/markup-compatibility/2006">
-        <mc:Choice xmlns:p14="http://schemas.microsoft.com/office/powerpoint/2010/main" Requires="p14">
+      <mc:AlternateContent xmlns:mc="http://schemas.openxmlformats.org/markup-compatibility/2006" xmlns:p14="http://schemas.microsoft.com/office/powerpoint/2010/main">
+        <mc:Choice Requires="p14">
           <p:contentPart p14:bwMode="auto" r:id="rId11">
             <p14:nvContentPartPr>
               <p14:cNvPr id="12" name="Pismo odręczne 11">
@@ -6777,7 +6801,7 @@
             </p14:xfrm>
           </p:contentPart>
         </mc:Choice>
-        <mc:Fallback>
+        <mc:Fallback xmlns="">
           <p:pic>
             <p:nvPicPr>
               <p:cNvPr id="12" name="Pismo odręczne 11">
@@ -6808,8 +6832,8 @@
           </p:pic>
         </mc:Fallback>
       </mc:AlternateContent>
-      <mc:AlternateContent xmlns:mc="http://schemas.openxmlformats.org/markup-compatibility/2006">
-        <mc:Choice xmlns:p14="http://schemas.microsoft.com/office/powerpoint/2010/main" Requires="p14">
+      <mc:AlternateContent xmlns:mc="http://schemas.openxmlformats.org/markup-compatibility/2006" xmlns:p14="http://schemas.microsoft.com/office/powerpoint/2010/main">
+        <mc:Choice Requires="p14">
           <p:contentPart p14:bwMode="auto" r:id="rId13">
             <p14:nvContentPartPr>
               <p14:cNvPr id="13" name="Pismo odręczne 12">
@@ -6828,7 +6852,7 @@
             </p14:xfrm>
           </p:contentPart>
         </mc:Choice>
-        <mc:Fallback>
+        <mc:Fallback xmlns="">
           <p:pic>
             <p:nvPicPr>
               <p:cNvPr id="13" name="Pismo odręczne 12">
@@ -6879,8 +6903,8 @@
             <a:chExt cx="3044160" cy="769680"/>
           </a:xfrm>
         </p:grpSpPr>
-        <mc:AlternateContent xmlns:mc="http://schemas.openxmlformats.org/markup-compatibility/2006">
-          <mc:Choice xmlns:p14="http://schemas.microsoft.com/office/powerpoint/2010/main" Requires="p14">
+        <mc:AlternateContent xmlns:mc="http://schemas.openxmlformats.org/markup-compatibility/2006" xmlns:p14="http://schemas.microsoft.com/office/powerpoint/2010/main">
+          <mc:Choice Requires="p14">
             <p:contentPart p14:bwMode="auto" r:id="rId15">
               <p14:nvContentPartPr>
                 <p14:cNvPr id="14" name="Pismo odręczne 13">
@@ -6899,7 +6923,7 @@
               </p14:xfrm>
             </p:contentPart>
           </mc:Choice>
-          <mc:Fallback>
+          <mc:Fallback xmlns="">
             <p:pic>
               <p:nvPicPr>
                 <p:cNvPr id="14" name="Pismo odręczne 13">
@@ -6930,8 +6954,8 @@
             </p:pic>
           </mc:Fallback>
         </mc:AlternateContent>
-        <mc:AlternateContent xmlns:mc="http://schemas.openxmlformats.org/markup-compatibility/2006">
-          <mc:Choice xmlns:p14="http://schemas.microsoft.com/office/powerpoint/2010/main" Requires="p14">
+        <mc:AlternateContent xmlns:mc="http://schemas.openxmlformats.org/markup-compatibility/2006" xmlns:p14="http://schemas.microsoft.com/office/powerpoint/2010/main">
+          <mc:Choice Requires="p14">
             <p:contentPart p14:bwMode="auto" r:id="rId17">
               <p14:nvContentPartPr>
                 <p14:cNvPr id="15" name="Pismo odręczne 14">
@@ -6950,7 +6974,7 @@
               </p14:xfrm>
             </p:contentPart>
           </mc:Choice>
-          <mc:Fallback>
+          <mc:Fallback xmlns="">
             <p:pic>
               <p:nvPicPr>
                 <p:cNvPr id="15" name="Pismo odręczne 14">
@@ -6981,8 +7005,8 @@
             </p:pic>
           </mc:Fallback>
         </mc:AlternateContent>
-        <mc:AlternateContent xmlns:mc="http://schemas.openxmlformats.org/markup-compatibility/2006">
-          <mc:Choice xmlns:p14="http://schemas.microsoft.com/office/powerpoint/2010/main" Requires="p14">
+        <mc:AlternateContent xmlns:mc="http://schemas.openxmlformats.org/markup-compatibility/2006" xmlns:p14="http://schemas.microsoft.com/office/powerpoint/2010/main">
+          <mc:Choice Requires="p14">
             <p:contentPart p14:bwMode="auto" r:id="rId19">
               <p14:nvContentPartPr>
                 <p14:cNvPr id="17" name="Pismo odręczne 16">
@@ -7001,7 +7025,7 @@
               </p14:xfrm>
             </p:contentPart>
           </mc:Choice>
-          <mc:Fallback>
+          <mc:Fallback xmlns="">
             <p:pic>
               <p:nvPicPr>
                 <p:cNvPr id="17" name="Pismo odręczne 16">
@@ -7032,8 +7056,8 @@
             </p:pic>
           </mc:Fallback>
         </mc:AlternateContent>
-        <mc:AlternateContent xmlns:mc="http://schemas.openxmlformats.org/markup-compatibility/2006">
-          <mc:Choice xmlns:p14="http://schemas.microsoft.com/office/powerpoint/2010/main" Requires="p14">
+        <mc:AlternateContent xmlns:mc="http://schemas.openxmlformats.org/markup-compatibility/2006" xmlns:p14="http://schemas.microsoft.com/office/powerpoint/2010/main">
+          <mc:Choice Requires="p14">
             <p:contentPart p14:bwMode="auto" r:id="rId21">
               <p14:nvContentPartPr>
                 <p14:cNvPr id="18" name="Pismo odręczne 17">
@@ -7052,7 +7076,7 @@
               </p14:xfrm>
             </p:contentPart>
           </mc:Choice>
-          <mc:Fallback>
+          <mc:Fallback xmlns="">
             <p:pic>
               <p:nvPicPr>
                 <p:cNvPr id="18" name="Pismo odręczne 17">
@@ -7083,8 +7107,8 @@
             </p:pic>
           </mc:Fallback>
         </mc:AlternateContent>
-        <mc:AlternateContent xmlns:mc="http://schemas.openxmlformats.org/markup-compatibility/2006">
-          <mc:Choice xmlns:p14="http://schemas.microsoft.com/office/powerpoint/2010/main" Requires="p14">
+        <mc:AlternateContent xmlns:mc="http://schemas.openxmlformats.org/markup-compatibility/2006" xmlns:p14="http://schemas.microsoft.com/office/powerpoint/2010/main">
+          <mc:Choice Requires="p14">
             <p:contentPart p14:bwMode="auto" r:id="rId23">
               <p14:nvContentPartPr>
                 <p14:cNvPr id="19" name="Pismo odręczne 18">
@@ -7103,7 +7127,7 @@
               </p14:xfrm>
             </p:contentPart>
           </mc:Choice>
-          <mc:Fallback>
+          <mc:Fallback xmlns="">
             <p:pic>
               <p:nvPicPr>
                 <p:cNvPr id="19" name="Pismo odręczne 18">
@@ -7134,8 +7158,8 @@
             </p:pic>
           </mc:Fallback>
         </mc:AlternateContent>
-        <mc:AlternateContent xmlns:mc="http://schemas.openxmlformats.org/markup-compatibility/2006">
-          <mc:Choice xmlns:p14="http://schemas.microsoft.com/office/powerpoint/2010/main" Requires="p14">
+        <mc:AlternateContent xmlns:mc="http://schemas.openxmlformats.org/markup-compatibility/2006" xmlns:p14="http://schemas.microsoft.com/office/powerpoint/2010/main">
+          <mc:Choice Requires="p14">
             <p:contentPart p14:bwMode="auto" r:id="rId25">
               <p14:nvContentPartPr>
                 <p14:cNvPr id="21" name="Pismo odręczne 20">
@@ -7154,7 +7178,7 @@
               </p14:xfrm>
             </p:contentPart>
           </mc:Choice>
-          <mc:Fallback>
+          <mc:Fallback xmlns="">
             <p:pic>
               <p:nvPicPr>
                 <p:cNvPr id="21" name="Pismo odręczne 20">
@@ -7185,8 +7209,8 @@
             </p:pic>
           </mc:Fallback>
         </mc:AlternateContent>
-        <mc:AlternateContent xmlns:mc="http://schemas.openxmlformats.org/markup-compatibility/2006">
-          <mc:Choice xmlns:p14="http://schemas.microsoft.com/office/powerpoint/2010/main" Requires="p14">
+        <mc:AlternateContent xmlns:mc="http://schemas.openxmlformats.org/markup-compatibility/2006" xmlns:p14="http://schemas.microsoft.com/office/powerpoint/2010/main">
+          <mc:Choice Requires="p14">
             <p:contentPart p14:bwMode="auto" r:id="rId27">
               <p14:nvContentPartPr>
                 <p14:cNvPr id="22" name="Pismo odręczne 21">
@@ -7205,7 +7229,7 @@
               </p14:xfrm>
             </p:contentPart>
           </mc:Choice>
-          <mc:Fallback>
+          <mc:Fallback xmlns="">
             <p:pic>
               <p:nvPicPr>
                 <p:cNvPr id="22" name="Pismo odręczne 21">
@@ -7236,8 +7260,8 @@
             </p:pic>
           </mc:Fallback>
         </mc:AlternateContent>
-        <mc:AlternateContent xmlns:mc="http://schemas.openxmlformats.org/markup-compatibility/2006">
-          <mc:Choice xmlns:p14="http://schemas.microsoft.com/office/powerpoint/2010/main" Requires="p14">
+        <mc:AlternateContent xmlns:mc="http://schemas.openxmlformats.org/markup-compatibility/2006" xmlns:p14="http://schemas.microsoft.com/office/powerpoint/2010/main">
+          <mc:Choice Requires="p14">
             <p:contentPart p14:bwMode="auto" r:id="rId29">
               <p14:nvContentPartPr>
                 <p14:cNvPr id="24" name="Pismo odręczne 23">
@@ -7256,7 +7280,7 @@
               </p14:xfrm>
             </p:contentPart>
           </mc:Choice>
-          <mc:Fallback>
+          <mc:Fallback xmlns="">
             <p:pic>
               <p:nvPicPr>
                 <p:cNvPr id="24" name="Pismo odręczne 23">
@@ -7287,8 +7311,8 @@
             </p:pic>
           </mc:Fallback>
         </mc:AlternateContent>
-        <mc:AlternateContent xmlns:mc="http://schemas.openxmlformats.org/markup-compatibility/2006">
-          <mc:Choice xmlns:p14="http://schemas.microsoft.com/office/powerpoint/2010/main" Requires="p14">
+        <mc:AlternateContent xmlns:mc="http://schemas.openxmlformats.org/markup-compatibility/2006" xmlns:p14="http://schemas.microsoft.com/office/powerpoint/2010/main">
+          <mc:Choice Requires="p14">
             <p:contentPart p14:bwMode="auto" r:id="rId31">
               <p14:nvContentPartPr>
                 <p14:cNvPr id="26" name="Pismo odręczne 25">
@@ -7307,7 +7331,7 @@
               </p14:xfrm>
             </p:contentPart>
           </mc:Choice>
-          <mc:Fallback>
+          <mc:Fallback xmlns="">
             <p:pic>
               <p:nvPicPr>
                 <p:cNvPr id="26" name="Pismo odręczne 25">
@@ -7338,8 +7362,8 @@
             </p:pic>
           </mc:Fallback>
         </mc:AlternateContent>
-        <mc:AlternateContent xmlns:mc="http://schemas.openxmlformats.org/markup-compatibility/2006">
-          <mc:Choice xmlns:p14="http://schemas.microsoft.com/office/powerpoint/2010/main" Requires="p14">
+        <mc:AlternateContent xmlns:mc="http://schemas.openxmlformats.org/markup-compatibility/2006" xmlns:p14="http://schemas.microsoft.com/office/powerpoint/2010/main">
+          <mc:Choice Requires="p14">
             <p:contentPart p14:bwMode="auto" r:id="rId33">
               <p14:nvContentPartPr>
                 <p14:cNvPr id="27" name="Pismo odręczne 26">
@@ -7358,7 +7382,7 @@
               </p14:xfrm>
             </p:contentPart>
           </mc:Choice>
-          <mc:Fallback>
+          <mc:Fallback xmlns="">
             <p:pic>
               <p:nvPicPr>
                 <p:cNvPr id="27" name="Pismo odręczne 26">
@@ -7389,8 +7413,8 @@
             </p:pic>
           </mc:Fallback>
         </mc:AlternateContent>
-        <mc:AlternateContent xmlns:mc="http://schemas.openxmlformats.org/markup-compatibility/2006">
-          <mc:Choice xmlns:p14="http://schemas.microsoft.com/office/powerpoint/2010/main" Requires="p14">
+        <mc:AlternateContent xmlns:mc="http://schemas.openxmlformats.org/markup-compatibility/2006" xmlns:p14="http://schemas.microsoft.com/office/powerpoint/2010/main">
+          <mc:Choice Requires="p14">
             <p:contentPart p14:bwMode="auto" r:id="rId35">
               <p14:nvContentPartPr>
                 <p14:cNvPr id="28" name="Pismo odręczne 27">
@@ -7409,7 +7433,7 @@
               </p14:xfrm>
             </p:contentPart>
           </mc:Choice>
-          <mc:Fallback>
+          <mc:Fallback xmlns="">
             <p:pic>
               <p:nvPicPr>
                 <p:cNvPr id="28" name="Pismo odręczne 27">
@@ -7440,8 +7464,8 @@
             </p:pic>
           </mc:Fallback>
         </mc:AlternateContent>
-        <mc:AlternateContent xmlns:mc="http://schemas.openxmlformats.org/markup-compatibility/2006">
-          <mc:Choice xmlns:p14="http://schemas.microsoft.com/office/powerpoint/2010/main" Requires="p14">
+        <mc:AlternateContent xmlns:mc="http://schemas.openxmlformats.org/markup-compatibility/2006" xmlns:p14="http://schemas.microsoft.com/office/powerpoint/2010/main">
+          <mc:Choice Requires="p14">
             <p:contentPart p14:bwMode="auto" r:id="rId37">
               <p14:nvContentPartPr>
                 <p14:cNvPr id="29" name="Pismo odręczne 28">
@@ -7460,7 +7484,7 @@
               </p14:xfrm>
             </p:contentPart>
           </mc:Choice>
-          <mc:Fallback>
+          <mc:Fallback xmlns="">
             <p:pic>
               <p:nvPicPr>
                 <p:cNvPr id="29" name="Pismo odręczne 28">
@@ -7491,8 +7515,8 @@
             </p:pic>
           </mc:Fallback>
         </mc:AlternateContent>
-        <mc:AlternateContent xmlns:mc="http://schemas.openxmlformats.org/markup-compatibility/2006">
-          <mc:Choice xmlns:p14="http://schemas.microsoft.com/office/powerpoint/2010/main" Requires="p14">
+        <mc:AlternateContent xmlns:mc="http://schemas.openxmlformats.org/markup-compatibility/2006" xmlns:p14="http://schemas.microsoft.com/office/powerpoint/2010/main">
+          <mc:Choice Requires="p14">
             <p:contentPart p14:bwMode="auto" r:id="rId39">
               <p14:nvContentPartPr>
                 <p14:cNvPr id="30" name="Pismo odręczne 29">
@@ -7511,7 +7535,7 @@
               </p14:xfrm>
             </p:contentPart>
           </mc:Choice>
-          <mc:Fallback>
+          <mc:Fallback xmlns="">
             <p:pic>
               <p:nvPicPr>
                 <p:cNvPr id="30" name="Pismo odręczne 29">
@@ -7542,8 +7566,8 @@
             </p:pic>
           </mc:Fallback>
         </mc:AlternateContent>
-        <mc:AlternateContent xmlns:mc="http://schemas.openxmlformats.org/markup-compatibility/2006">
-          <mc:Choice xmlns:p14="http://schemas.microsoft.com/office/powerpoint/2010/main" Requires="p14">
+        <mc:AlternateContent xmlns:mc="http://schemas.openxmlformats.org/markup-compatibility/2006" xmlns:p14="http://schemas.microsoft.com/office/powerpoint/2010/main">
+          <mc:Choice Requires="p14">
             <p:contentPart p14:bwMode="auto" r:id="rId41">
               <p14:nvContentPartPr>
                 <p14:cNvPr id="32" name="Pismo odręczne 31">
@@ -7562,7 +7586,7 @@
               </p14:xfrm>
             </p:contentPart>
           </mc:Choice>
-          <mc:Fallback>
+          <mc:Fallback xmlns="">
             <p:pic>
               <p:nvPicPr>
                 <p:cNvPr id="32" name="Pismo odręczne 31">
@@ -7593,8 +7617,8 @@
             </p:pic>
           </mc:Fallback>
         </mc:AlternateContent>
-        <mc:AlternateContent xmlns:mc="http://schemas.openxmlformats.org/markup-compatibility/2006">
-          <mc:Choice xmlns:p14="http://schemas.microsoft.com/office/powerpoint/2010/main" Requires="p14">
+        <mc:AlternateContent xmlns:mc="http://schemas.openxmlformats.org/markup-compatibility/2006" xmlns:p14="http://schemas.microsoft.com/office/powerpoint/2010/main">
+          <mc:Choice Requires="p14">
             <p:contentPart p14:bwMode="auto" r:id="rId43">
               <p14:nvContentPartPr>
                 <p14:cNvPr id="34" name="Pismo odręczne 33">
@@ -7613,7 +7637,7 @@
               </p14:xfrm>
             </p:contentPart>
           </mc:Choice>
-          <mc:Fallback>
+          <mc:Fallback xmlns="">
             <p:pic>
               <p:nvPicPr>
                 <p:cNvPr id="34" name="Pismo odręczne 33">
@@ -7649,6 +7673,106 @@
     <p:extLst>
       <p:ext uri="{BB962C8B-B14F-4D97-AF65-F5344CB8AC3E}">
         <p14:creationId xmlns:p14="http://schemas.microsoft.com/office/powerpoint/2010/main" val="2303772349"/>
+      </p:ext>
+    </p:extLst>
+  </p:cSld>
+  <p:clrMapOvr>
+    <a:masterClrMapping/>
+  </p:clrMapOvr>
+</p:sld>
+</file>
+
+<file path=ppt/slides/slide21.xml><?xml version="1.0" encoding="utf-8"?>
+<p:sld xmlns:a="http://schemas.openxmlformats.org/drawingml/2006/main" xmlns:r="http://schemas.openxmlformats.org/officeDocument/2006/relationships" xmlns:p="http://schemas.openxmlformats.org/presentationml/2006/main">
+  <p:cSld>
+    <p:spTree>
+      <p:nvGrpSpPr>
+        <p:cNvPr id="1" name=""/>
+        <p:cNvGrpSpPr/>
+        <p:nvPr/>
+      </p:nvGrpSpPr>
+      <p:grpSpPr>
+        <a:xfrm>
+          <a:off x="0" y="0"/>
+          <a:ext cx="0" cy="0"/>
+          <a:chOff x="0" y="0"/>
+          <a:chExt cx="0" cy="0"/>
+        </a:xfrm>
+      </p:grpSpPr>
+      <p:sp>
+        <p:nvSpPr>
+          <p:cNvPr id="2" name="Tytuł 1">
+            <a:extLst>
+              <a:ext uri="{FF2B5EF4-FFF2-40B4-BE49-F238E27FC236}">
+                <a16:creationId xmlns:a16="http://schemas.microsoft.com/office/drawing/2014/main" id="{A2506B09-6A8A-B1FB-9F61-EC98CFE924C7}"/>
+              </a:ext>
+            </a:extLst>
+          </p:cNvPr>
+          <p:cNvSpPr>
+            <a:spLocks noGrp="1"/>
+          </p:cNvSpPr>
+          <p:nvPr>
+            <p:ph type="title"/>
+          </p:nvPr>
+        </p:nvSpPr>
+        <p:spPr>
+          <a:xfrm>
+            <a:off x="646176" y="2675731"/>
+            <a:ext cx="10515600" cy="1325563"/>
+          </a:xfrm>
+        </p:spPr>
+        <p:txBody>
+          <a:bodyPr/>
+          <a:lstStyle/>
+          <a:p>
+            <a:r>
+              <a:rPr lang="pl-PL" dirty="0"/>
+              <a:t>https://github.com/Equerm8/stm_wifi_project</a:t>
+            </a:r>
+          </a:p>
+        </p:txBody>
+      </p:sp>
+      <p:sp>
+        <p:nvSpPr>
+          <p:cNvPr id="3" name="Symbol zastępczy zawartości 2">
+            <a:extLst>
+              <a:ext uri="{FF2B5EF4-FFF2-40B4-BE49-F238E27FC236}">
+                <a16:creationId xmlns:a16="http://schemas.microsoft.com/office/drawing/2014/main" id="{7DF0B14F-B0C7-404A-1B0B-D8A4A9086EDA}"/>
+              </a:ext>
+            </a:extLst>
+          </p:cNvPr>
+          <p:cNvSpPr>
+            <a:spLocks noGrp="1"/>
+          </p:cNvSpPr>
+          <p:nvPr>
+            <p:ph idx="1"/>
+          </p:nvPr>
+        </p:nvSpPr>
+        <p:spPr>
+          <a:xfrm>
+            <a:off x="646176" y="636905"/>
+            <a:ext cx="10515600" cy="4351338"/>
+          </a:xfrm>
+        </p:spPr>
+        <p:txBody>
+          <a:bodyPr/>
+          <a:lstStyle/>
+          <a:p>
+            <a:pPr marL="0" indent="0">
+              <a:buNone/>
+            </a:pPr>
+            <a:r>
+              <a:rPr lang="pl-PL" dirty="0" err="1"/>
+              <a:t>repo</a:t>
+            </a:r>
+            <a:endParaRPr lang="pl-PL" dirty="0"/>
+          </a:p>
+        </p:txBody>
+      </p:sp>
+    </p:spTree>
+    <p:extLst>
+      <p:ext uri="{BB962C8B-B14F-4D97-AF65-F5344CB8AC3E}">
+        <p14:creationId xmlns:p14="http://schemas.microsoft.com/office/powerpoint/2010/main" val="44316669"/>
       </p:ext>
     </p:extLst>
   </p:cSld>
